--- a/Poster_Egresos_Hospitalarios_Grupo3.pptx
+++ b/Poster_Egresos_Hospitalarios_Grupo3.pptx
@@ -287,7 +287,7 @@
       </p15:sldGuideLst>
     </p:ext>
     <p:ext uri="http://customooxmlschemas.google.com/">
-      <go:slidesCustomData xmlns:go="http://customooxmlschemas.google.com/" xmlns:p15="http://schemas.microsoft.com/office/powerpoint/2012/main" xmlns:p14="http://schemas.microsoft.com/office/powerpoint/2010/main" xmlns:com="http://schemas.openxmlformats.org/drawingml/2006/compatibility" xmlns:pvml="urn:schemas-microsoft-com:office:powerpoint" xmlns:v="urn:schemas-microsoft-com:vml" xmlns:o="urn:schemas-microsoft-com:office:office" xmlns:dgm="http://schemas.openxmlformats.org/drawingml/2006/diagram" xmlns:c="http://schemas.openxmlformats.org/drawingml/2006/chart" xmlns:mv="urn:schemas-microsoft-com:mac:vml" xmlns:mc="http://schemas.openxmlformats.org/markup-compatibility/2006" xmlns="" r:id="rId7" roundtripDataSignature="AMtx7mikYjNCgGV/2O2uv1anaAkZoHec/g=="/>
+      <go:slidesCustomData xmlns="" xmlns:mc="http://schemas.openxmlformats.org/markup-compatibility/2006" xmlns:mv="urn:schemas-microsoft-com:mac:vml" xmlns:c="http://schemas.openxmlformats.org/drawingml/2006/chart" xmlns:dgm="http://schemas.openxmlformats.org/drawingml/2006/diagram" xmlns:o="urn:schemas-microsoft-com:office:office" xmlns:v="urn:schemas-microsoft-com:vml" xmlns:pvml="urn:schemas-microsoft-com:office:powerpoint" xmlns:com="http://schemas.openxmlformats.org/drawingml/2006/compatibility" xmlns:p14="http://schemas.microsoft.com/office/powerpoint/2010/main" xmlns:p15="http://schemas.microsoft.com/office/powerpoint/2012/main" xmlns:go="http://customooxmlschemas.google.com/" r:id="rId7" roundtripDataSignature="AMtx7mikYjNCgGV/2O2uv1anaAkZoHec/g=="/>
     </p:ext>
   </p:extLst>
 </p:presentation>
@@ -11301,7 +11301,7 @@
               <a:buNone/>
             </a:pPr>
             <a:r>
-              <a:rPr lang="es-ES" sz="2500" dirty="0" err="1">
+              <a:rPr lang="es-ES" sz="2500" dirty="0">
                 <a:solidFill>
                   <a:srgbClr val="595959"/>
                 </a:solidFill>
@@ -11310,7 +11310,7 @@
                 <a:cs typeface="Times New Roman" panose="02020603050405020304" pitchFamily="18" charset="0"/>
                 <a:sym typeface="Calibri"/>
               </a:rPr>
-              <a:t>lezambra@espol.edu.ec</a:t>
+              <a:t>ltzambra@espol.edu.ec</a:t>
             </a:r>
             <a:endParaRPr dirty="0">
               <a:latin typeface="Times New Roman" panose="02020603050405020304" pitchFamily="18" charset="0"/>
@@ -11407,7 +11407,7 @@
               <a:buNone/>
             </a:pPr>
             <a:r>
-              <a:rPr lang="es-ES" sz="2500" dirty="0" err="1">
+              <a:rPr lang="es-ES" sz="2500" dirty="0">
                 <a:solidFill>
                   <a:srgbClr val="595959"/>
                 </a:solidFill>
@@ -11416,7 +11416,7 @@
                 <a:cs typeface="Times New Roman" panose="02020603050405020304" pitchFamily="18" charset="0"/>
                 <a:sym typeface="Calibri"/>
               </a:rPr>
-              <a:t>jajmuril@espol.edu.ec</a:t>
+              <a:t>jajomuri@espol.edu.ec</a:t>
             </a:r>
             <a:endParaRPr dirty="0">
               <a:latin typeface="Times New Roman" panose="02020603050405020304" pitchFamily="18" charset="0"/>
@@ -11529,17 +11529,9 @@
             </a:endParaRPr>
           </a:p>
           <a:p>
-            <a:pPr marL="0" marR="0" lvl="0" indent="0" algn="l" rtl="0">
-              <a:spcBef>
-                <a:spcPts val="0"/>
-              </a:spcBef>
-              <a:spcAft>
-                <a:spcPts val="0"/>
-              </a:spcAft>
-              <a:buNone/>
-            </a:pPr>
+            <a:pPr lvl="0"/>
             <a:r>
-              <a:rPr lang="es-ES" sz="2500" dirty="0" err="1">
+              <a:rPr lang="es-ES" sz="2500" dirty="0">
                 <a:solidFill>
                   <a:srgbClr val="595959"/>
                 </a:solidFill>
@@ -11548,7 +11540,7 @@
                 <a:cs typeface="Times New Roman" panose="02020603050405020304" pitchFamily="18" charset="0"/>
                 <a:sym typeface="Calibri"/>
               </a:rPr>
-              <a:t>jiguaman@espol.edu.ec</a:t>
+              <a:t>joguherr@espol.edu.ec</a:t>
             </a:r>
             <a:endParaRPr dirty="0">
               <a:latin typeface="Times New Roman" panose="02020603050405020304" pitchFamily="18" charset="0"/>
@@ -11706,7 +11698,7 @@
               <a:buChar char="•"/>
             </a:pPr>
             <a:r>
-              <a:rPr lang="es-ES_tradnl" sz="3000">
+              <a:rPr lang="es-ES_tradnl" sz="3000" dirty="0">
                 <a:solidFill>
                   <a:srgbClr val="595959"/>
                 </a:solidFill>
@@ -12306,8 +12298,8 @@
         </p:blipFill>
         <p:spPr>
           <a:xfrm>
-            <a:off x="1862531" y="20582776"/>
-            <a:ext cx="8863806" cy="5819560"/>
+            <a:off x="1670219" y="20478818"/>
+            <a:ext cx="9288066" cy="6098109"/>
           </a:xfrm>
           <a:prstGeom prst="rect">
             <a:avLst/>
